--- a/exports/02_text_heavy_bullets.pptx
+++ b/exports/02_text_heavy_bullets.pptx
@@ -503,7 +503,8 @@
           <a:p>
             <a:r>
               <a:rPr lang="en-US" dirty="0"/>
-              <a:t>Technical deep dive.</a:t>
+              <a:t>Technical deep dive.
+Source: 02_text_heavy_bullets.pdf</a:t>
             </a:r>
             <a:endParaRPr lang="en-US" dirty="0"/>
           </a:p>
@@ -591,7 +592,8 @@
           <a:p>
             <a:r>
               <a:rPr lang="en-US" dirty="0"/>
-              <a:t>Discuss latency limits and distributed transaction isolation.</a:t>
+              <a:t>Discuss latency limits and distributed transaction isolation.
+Source: 02_text_heavy_bullets.pdf</a:t>
             </a:r>
             <a:endParaRPr lang="en-US" dirty="0"/>
           </a:p>
